--- a/1.1. ANADEC 202620 - Costo de Oportunidad y Valor del Dinero en el Tiempo (Parte I) - Desarrollada.pptx
+++ b/1.1. ANADEC 202620 - Costo de Oportunidad y Valor del Dinero en el Tiempo (Parte I) - Desarrollada.pptx
@@ -1022,6 +1022,67 @@
     <p:extLst>
       <p:ext uri="{BB962C8B-B14F-4D97-AF65-F5344CB8AC3E}">
         <p14:creationId xmlns:p14="http://schemas.microsoft.com/office/powerpoint/2010/main" val="789880831"/>
+      </p:ext>
+    </p:extLst>
+  </p:cSld>
+  <p:clrMapOvr>
+    <a:masterClrMapping/>
+  </p:clrMapOvr>
+</p:notes>
+</file>
+
+<file path=ppt/notesSlides/notesSlide5.xml><?xml version="1.0" encoding="utf-8"?>
+<p:notes xmlns:a="http://schemas.openxmlformats.org/drawingml/2006/main" xmlns:r="http://schemas.openxmlformats.org/officeDocument/2006/relationships" xmlns:p="http://schemas.openxmlformats.org/presentationml/2006/main">
+  <p:cSld>
+    <p:spTree>
+      <p:nvGrpSpPr>
+        <p:cNvPr id="1" name=""/>
+        <p:cNvGrpSpPr/>
+        <p:nvPr/>
+      </p:nvGrpSpPr>
+      <p:grpSpPr>
+        <a:xfrm>
+          <a:off x="0" y="0"/>
+          <a:ext cx="0" cy="0"/>
+          <a:chOff x="0" y="0"/>
+          <a:chExt cx="0" cy="0"/>
+        </a:xfrm>
+      </p:grpSpPr>
+      <p:sp>
+        <p:nvSpPr>
+          <p:cNvPr id="2" name="Slide Image Placeholder 1"/>
+          <p:cNvSpPr>
+            <a:spLocks noGrp="1" noRot="1" noChangeAspect="1"/>
+          </p:cNvSpPr>
+          <p:nvPr>
+            <p:ph type="sldImg"/>
+          </p:nvPr>
+        </p:nvSpPr>
+        <p:spPr/>
+      </p:sp>
+      <p:sp>
+        <p:nvSpPr>
+          <p:cNvPr id="3" name="Notes Placeholder 2"/>
+          <p:cNvSpPr>
+            <a:spLocks noGrp="1"/>
+          </p:cNvSpPr>
+          <p:nvPr>
+            <p:ph type="body" idx="1"/>
+          </p:nvPr>
+        </p:nvSpPr>
+        <p:spPr/>
+        <p:txBody>
+          <a:bodyPr/>
+          <a:lstStyle/>
+          <a:p>
+            <a:endParaRPr lang="es-ES_tradnl" dirty="0"/>
+          </a:p>
+        </p:txBody>
+      </p:sp>
+    </p:spTree>
+    <p:extLst>
+      <p:ext uri="{BB962C8B-B14F-4D97-AF65-F5344CB8AC3E}">
+        <p14:creationId xmlns:p14="http://schemas.microsoft.com/office/powerpoint/2010/main" val="3524377666"/>
       </p:ext>
     </p:extLst>
   </p:cSld>
@@ -6771,7 +6832,7 @@
                             </p:stCondLst>
                             <p:childTnLst>
                               <p:par>
-                                <p:cTn id="10" presetID="16" presetClass="entr" presetSubtype="21" fill="hold" grpId="0" nodeType="clickEffect">
+                                <p:cTn id="10" presetID="1" presetClass="entr" presetSubtype="0" fill="hold" grpId="0" nodeType="clickEffect">
                                   <p:stCondLst>
                                     <p:cond delay="0"/>
                                   </p:stCondLst>
@@ -6779,6 +6840,51 @@
                                     <p:set>
                                       <p:cBhvr>
                                         <p:cTn id="11" dur="1" fill="hold">
+                                          <p:stCondLst>
+                                            <p:cond delay="0"/>
+                                          </p:stCondLst>
+                                        </p:cTn>
+                                        <p:tgtEl>
+                                          <p:spTgt spid="3"/>
+                                        </p:tgtEl>
+                                        <p:attrNameLst>
+                                          <p:attrName>style.visibility</p:attrName>
+                                        </p:attrNameLst>
+                                      </p:cBhvr>
+                                      <p:to>
+                                        <p:strVal val="visible"/>
+                                      </p:to>
+                                    </p:set>
+                                  </p:childTnLst>
+                                </p:cTn>
+                              </p:par>
+                            </p:childTnLst>
+                          </p:cTn>
+                        </p:par>
+                      </p:childTnLst>
+                    </p:cTn>
+                  </p:par>
+                  <p:par>
+                    <p:cTn id="12" fill="hold">
+                      <p:stCondLst>
+                        <p:cond delay="indefinite"/>
+                      </p:stCondLst>
+                      <p:childTnLst>
+                        <p:par>
+                          <p:cTn id="13" fill="hold">
+                            <p:stCondLst>
+                              <p:cond delay="0"/>
+                            </p:stCondLst>
+                            <p:childTnLst>
+                              <p:par>
+                                <p:cTn id="14" presetID="16" presetClass="entr" presetSubtype="21" fill="hold" grpId="0" nodeType="clickEffect">
+                                  <p:stCondLst>
+                                    <p:cond delay="0"/>
+                                  </p:stCondLst>
+                                  <p:childTnLst>
+                                    <p:set>
+                                      <p:cBhvr>
+                                        <p:cTn id="15" dur="1" fill="hold">
                                           <p:stCondLst>
                                             <p:cond delay="0"/>
                                           </p:stCondLst>
@@ -6796,7 +6902,7 @@
                                     </p:set>
                                     <p:animEffect transition="in" filter="barn(inVertical)">
                                       <p:cBhvr>
-                                        <p:cTn id="12" dur="500"/>
+                                        <p:cTn id="16" dur="500"/>
                                         <p:tgtEl>
                                           <p:spTgt spid="5"/>
                                         </p:tgtEl>
@@ -6834,6 +6940,7 @@
     </p:tnLst>
     <p:bldLst>
       <p:bldP spid="8" grpId="0"/>
+      <p:bldP spid="3" grpId="0" animBg="1"/>
       <p:bldP spid="5" grpId="0" animBg="1"/>
     </p:bldLst>
   </p:timing>
@@ -9704,7 +9811,7 @@
         </p:blipFill>
         <p:spPr>
           <a:xfrm>
-            <a:off x="1289264" y="1904660"/>
+            <a:off x="1289264" y="1898082"/>
             <a:ext cx="7200531" cy="4640342"/>
           </a:xfrm>
           <a:prstGeom prst="rect">
@@ -12446,7 +12553,7 @@
           <p:nvPr/>
         </p:nvPicPr>
         <p:blipFill>
-          <a:blip r:embed="rId2">
+          <a:blip r:embed="rId3">
             <a:extLst>
               <a:ext uri="{28A0092B-C50C-407E-A947-70E740481C1C}">
                 <a14:useLocalDpi xmlns:a14="http://schemas.microsoft.com/office/drawing/2010/main" val="0"/>
@@ -12496,7 +12603,7 @@
           <a:blip>
             <a:extLst>
               <a:ext uri="{96DAC541-7B7A-43D3-8B79-37D633B846F1}">
-                <asvg:svgBlip xmlns:asvg="http://schemas.microsoft.com/office/drawing/2016/SVG/main" r:embed="rId3"/>
+                <asvg:svgBlip xmlns:asvg="http://schemas.microsoft.com/office/drawing/2016/SVG/main" r:embed="rId4"/>
               </a:ext>
             </a:extLst>
           </a:blip>
